--- a/docs/arb-bound-deck.pptx
+++ b/docs/arb-bound-deck.pptx
@@ -11689,12 +11689,12 @@
           </a:fontRef>
         </p:style>
         <p:txBody>
-          <a:bodyPr rtlCol="0" anchor="ctr" wrap="square" lIns="164592" tIns="109728"/>
+          <a:bodyPr rtlCol="0" anchor="ctr" wrap="square" lIns="128016" tIns="109728"/>
           <a:lstStyle/>
           <a:p>
             <a:pPr algn="ctr"/>
             <a:r>
-              <a:rPr sz="3000" b="1">
+              <a:rPr sz="2600" b="1">
                 <a:solidFill>
                   <a:srgbClr val="A03030"/>
                 </a:solidFill>
@@ -11705,13 +11705,13 @@
           </a:p>
           <a:p>
             <a:r>
-              <a:rPr sz="1100">
+              <a:rPr sz="1200">
                 <a:solidFill>
                   <a:srgbClr val="6B6862"/>
                 </a:solidFill>
                 <a:latin typeface="Inter"/>
               </a:rPr>
-              <a:t>GOLDGUINEA/GOLDM  (bps)</a:t>
+              <a:t>GUINEA / M</a:t>
             </a:r>
           </a:p>
         </p:txBody>
@@ -11755,12 +11755,12 @@
           </a:fontRef>
         </p:style>
         <p:txBody>
-          <a:bodyPr rtlCol="0" anchor="ctr" wrap="square" lIns="164592" tIns="109728"/>
+          <a:bodyPr rtlCol="0" anchor="ctr" wrap="square" lIns="128016" tIns="109728"/>
           <a:lstStyle/>
           <a:p>
             <a:pPr algn="ctr"/>
             <a:r>
-              <a:rPr sz="3000" b="1">
+              <a:rPr sz="2600" b="1">
                 <a:solidFill>
                   <a:srgbClr val="A67C00"/>
                 </a:solidFill>
@@ -11771,13 +11771,13 @@
           </a:p>
           <a:p>
             <a:r>
-              <a:rPr sz="1100">
+              <a:rPr sz="1200">
                 <a:solidFill>
                   <a:srgbClr val="6B6862"/>
                 </a:solidFill>
                 <a:latin typeface="Inter"/>
               </a:rPr>
-              <a:t>GOLDGUINEA/GOLDPETAL  (bps)</a:t>
+              <a:t>GUINEA / PETAL</a:t>
             </a:r>
           </a:p>
         </p:txBody>
@@ -11821,12 +11821,12 @@
           </a:fontRef>
         </p:style>
         <p:txBody>
-          <a:bodyPr rtlCol="0" anchor="ctr" wrap="square" lIns="164592" tIns="109728"/>
+          <a:bodyPr rtlCol="0" anchor="ctr" wrap="square" lIns="128016" tIns="109728"/>
           <a:lstStyle/>
           <a:p>
             <a:pPr algn="ctr"/>
             <a:r>
-              <a:rPr sz="3000" b="1">
+              <a:rPr sz="2600" b="1">
                 <a:solidFill>
                   <a:srgbClr val="A67C00"/>
                 </a:solidFill>
@@ -11837,13 +11837,13 @@
           </a:p>
           <a:p>
             <a:r>
-              <a:rPr sz="1100">
+              <a:rPr sz="1200">
                 <a:solidFill>
                   <a:srgbClr val="6B6862"/>
                 </a:solidFill>
                 <a:latin typeface="Inter"/>
               </a:rPr>
-              <a:t>GOLDGUINEA/GOLDTEN  (bps)</a:t>
+              <a:t>GUINEA / TEN</a:t>
             </a:r>
           </a:p>
         </p:txBody>
@@ -11887,12 +11887,12 @@
           </a:fontRef>
         </p:style>
         <p:txBody>
-          <a:bodyPr rtlCol="0" anchor="ctr" wrap="square" lIns="164592" tIns="109728"/>
+          <a:bodyPr rtlCol="0" anchor="ctr" wrap="square" lIns="128016" tIns="109728"/>
           <a:lstStyle/>
           <a:p>
             <a:pPr algn="ctr"/>
             <a:r>
-              <a:rPr sz="3000" b="1">
+              <a:rPr sz="2600" b="1">
                 <a:solidFill>
                   <a:srgbClr val="A03030"/>
                 </a:solidFill>
@@ -11903,13 +11903,13 @@
           </a:p>
           <a:p>
             <a:r>
-              <a:rPr sz="1100">
+              <a:rPr sz="1200">
                 <a:solidFill>
                   <a:srgbClr val="6B6862"/>
                 </a:solidFill>
                 <a:latin typeface="Inter"/>
               </a:rPr>
-              <a:t>GOLDM/GOLDPETAL  (bps)</a:t>
+              <a:t>M / PETAL</a:t>
             </a:r>
           </a:p>
         </p:txBody>
@@ -11953,12 +11953,12 @@
           </a:fontRef>
         </p:style>
         <p:txBody>
-          <a:bodyPr rtlCol="0" anchor="ctr" wrap="square" lIns="164592" tIns="109728"/>
+          <a:bodyPr rtlCol="0" anchor="ctr" wrap="square" lIns="128016" tIns="109728"/>
           <a:lstStyle/>
           <a:p>
             <a:pPr algn="ctr"/>
             <a:r>
-              <a:rPr sz="3000" b="1">
+              <a:rPr sz="2600" b="1">
                 <a:solidFill>
                   <a:srgbClr val="A03030"/>
                 </a:solidFill>
@@ -11969,13 +11969,13 @@
           </a:p>
           <a:p>
             <a:r>
-              <a:rPr sz="1100">
+              <a:rPr sz="1200">
                 <a:solidFill>
                   <a:srgbClr val="6B6862"/>
                 </a:solidFill>
                 <a:latin typeface="Inter"/>
               </a:rPr>
-              <a:t>GOLDM/GOLDTEN  (bps)</a:t>
+              <a:t>M / TEN</a:t>
             </a:r>
           </a:p>
         </p:txBody>
@@ -12019,12 +12019,12 @@
           </a:fontRef>
         </p:style>
         <p:txBody>
-          <a:bodyPr rtlCol="0" anchor="ctr" wrap="square" lIns="164592" tIns="109728"/>
+          <a:bodyPr rtlCol="0" anchor="ctr" wrap="square" lIns="128016" tIns="109728"/>
           <a:lstStyle/>
           <a:p>
             <a:pPr algn="ctr"/>
             <a:r>
-              <a:rPr sz="3000" b="1">
+              <a:rPr sz="2600" b="1">
                 <a:solidFill>
                   <a:srgbClr val="A67C00"/>
                 </a:solidFill>
@@ -12035,13 +12035,13 @@
           </a:p>
           <a:p>
             <a:r>
-              <a:rPr sz="1100">
+              <a:rPr sz="1200">
                 <a:solidFill>
                   <a:srgbClr val="6B6862"/>
                 </a:solidFill>
                 <a:latin typeface="Inter"/>
               </a:rPr>
-              <a:t>GOLDPETAL/GOLDTEN  (bps)</a:t>
+              <a:t>PETAL / TEN</a:t>
             </a:r>
           </a:p>
         </p:txBody>
@@ -12898,7 +12898,7 @@
           </a:fontRef>
         </p:style>
         <p:txBody>
-          <a:bodyPr rtlCol="0" anchor="ctr" wrap="square" lIns="164592" tIns="109728"/>
+          <a:bodyPr rtlCol="0" anchor="ctr" wrap="square" lIns="128016" tIns="109728"/>
           <a:lstStyle/>
           <a:p>
             <a:pPr algn="ctr"/>
@@ -12914,7 +12914,7 @@
           </a:p>
           <a:p>
             <a:r>
-              <a:rPr sz="1100">
+              <a:rPr sz="1200">
                 <a:solidFill>
                   <a:srgbClr val="6B6862"/>
                 </a:solidFill>
@@ -12964,7 +12964,7 @@
           </a:fontRef>
         </p:style>
         <p:txBody>
-          <a:bodyPr rtlCol="0" anchor="ctr" wrap="square" lIns="164592" tIns="109728"/>
+          <a:bodyPr rtlCol="0" anchor="ctr" wrap="square" lIns="128016" tIns="109728"/>
           <a:lstStyle/>
           <a:p>
             <a:pPr algn="ctr"/>
@@ -12980,7 +12980,7 @@
           </a:p>
           <a:p>
             <a:r>
-              <a:rPr sz="1100">
+              <a:rPr sz="1200">
                 <a:solidFill>
                   <a:srgbClr val="6B6862"/>
                 </a:solidFill>
@@ -13030,7 +13030,7 @@
           </a:fontRef>
         </p:style>
         <p:txBody>
-          <a:bodyPr rtlCol="0" anchor="ctr" wrap="square" lIns="164592" tIns="109728"/>
+          <a:bodyPr rtlCol="0" anchor="ctr" wrap="square" lIns="128016" tIns="109728"/>
           <a:lstStyle/>
           <a:p>
             <a:pPr algn="ctr"/>
@@ -13046,13 +13046,13 @@
           </a:p>
           <a:p>
             <a:r>
-              <a:rPr sz="1100">
+              <a:rPr sz="1200">
                 <a:solidFill>
                   <a:srgbClr val="6B6862"/>
                 </a:solidFill>
                 <a:latin typeface="Inter"/>
               </a:rPr>
-              <a:t>pairs with a stable structural level</a:t>
+              <a:t>pairs with a stable level</a:t>
             </a:r>
           </a:p>
         </p:txBody>
@@ -13096,7 +13096,7 @@
           </a:fontRef>
         </p:style>
         <p:txBody>
-          <a:bodyPr rtlCol="0" anchor="ctr" wrap="square" lIns="164592" tIns="109728"/>
+          <a:bodyPr rtlCol="0" anchor="ctr" wrap="square" lIns="128016" tIns="109728"/>
           <a:lstStyle/>
           <a:p>
             <a:pPr algn="ctr"/>
@@ -13112,13 +13112,13 @@
           </a:p>
           <a:p>
             <a:r>
-              <a:rPr sz="1100">
+              <a:rPr sz="1200">
                 <a:solidFill>
                   <a:srgbClr val="6B6862"/>
                 </a:solidFill>
                 <a:latin typeface="Inter"/>
               </a:rPr>
-              <a:t>persistent edges that survive costs</a:t>
+              <a:t>persistent edges survive costs</a:t>
             </a:r>
           </a:p>
         </p:txBody>

--- a/docs/arb-bound-deck.pptx
+++ b/docs/arb-bound-deck.pptx
@@ -10500,7 +10500,7 @@
                 </a:solidFill>
                 <a:latin typeface="Inter"/>
               </a:rPr>
-              <a:t>In 2024-11-07, ₹2,164 of gold premium evaporated in 15 trading days. We found the day — and proved it was never an arbitrage.</a:t>
+              <a:t>On 2024-11-07, 258 basis points of gold premium evaporated. We found the day — and proved it was never an arbitrage.</a:t>
             </a:r>
           </a:p>
         </p:txBody>
@@ -14046,7 +14046,7 @@
                 </a:solidFill>
                 <a:latin typeface="Inter"/>
               </a:rPr>
-              <a:t>Open question, deliberately unanswered:  GOLDGUINEA/GOLDPETAL moved +246 → -12 bps across ~3 weeks in November 2024 — a monotone drift, not a dated circular taking effect.</a:t>
+              <a:t>Open question, deliberately unanswered:  GUINEA / PETAL moved +246 → -12 bps across weeks around 2024-11-07 — a drift, not a dated circular taking effect.</a:t>
             </a:r>
           </a:p>
           <a:p>
@@ -14065,7 +14065,7 @@
                 </a:solidFill>
                 <a:latin typeface="Inter"/>
               </a:rPr>
-              <a:t>The nearest MCX circular (Aug 2025) post-dates it by eight months and cannot explain it. We report it as a dated open question rather than inventing a cause.</a:t>
+              <a:t>A structural cost cannot move like that, so something else drove it. We report it as a dated open question rather than inventing a cause.</a:t>
             </a:r>
           </a:p>
         </p:txBody>

--- a/docs/arb-bound-deck.pptx
+++ b/docs/arb-bound-deck.pptx
@@ -14046,7 +14046,7 @@
                 </a:solidFill>
                 <a:latin typeface="Inter"/>
               </a:rPr>
-              <a:t>Open question, deliberately unanswered:  GUINEA / PETAL moved +246 → -12 bps across weeks around 2024-11-07 — a drift, not a dated circular taking effect.</a:t>
+              <a:t>Dated and decomposed:  GUINEA / PETAL moved +246 → -12 bps across weeks around 2024-11-07 — a drift, not a dated circular taking effect.</a:t>
             </a:r>
           </a:p>
           <a:p>
@@ -14065,7 +14065,7 @@
                 </a:solidFill>
                 <a:latin typeface="Inter"/>
               </a:rPr>
-              <a:t>A structural cost cannot move like that, so something else drove it. We report it as a dated open question rather than inventing a cause.</a:t>
+              <a:t>A structural cost cannot move like that, so we decomposed it by contract: the complex fell while the liquid leg held its premium. The rule-change channel is closed against MCX's own consolidated circular list.</a:t>
             </a:r>
           </a:p>
         </p:txBody>
@@ -14209,7 +14209,7 @@
                 </a:solidFill>
                 <a:latin typeface="Inter"/>
               </a:rPr>
-              <a:t>Close the open question</a:t>
+              <a:t>Attribute the two stable breaches</a:t>
             </a:r>
           </a:p>
         </p:txBody>
@@ -14251,7 +14251,7 @@
                 </a:solidFill>
                 <a:latin typeface="Inter"/>
               </a:rPr>
-              <a:t>Pull MCX circulars for Oct–Dec 2024 and test whether a contract-spec or delivery change explains the November break.</a:t>
+              <a:t>GOLDGUINEA/GOLDM and GOLDM/GOLDPETAL breach the bound on a stable level. The GOLDM duty wedge is currently a stated 0–400 bps range; a sourced duty history would resolve it.</a:t>
             </a:r>
           </a:p>
         </p:txBody>
@@ -14293,7 +14293,7 @@
                 </a:solidFill>
                 <a:latin typeface="Inter"/>
               </a:rPr>
-              <a:t>Attribute the two stable breaches</a:t>
+              <a:t>Silver</a:t>
             </a:r>
           </a:p>
         </p:txBody>
@@ -14335,7 +14335,7 @@
                 </a:solidFill>
                 <a:latin typeface="Inter"/>
               </a:rPr>
-              <a:t>GOLDGUINEA/GOLDM and GOLDM/GOLDPETAL breach the bound on a stable level. The GOLDM duty wedge is currently a stated 0–400 bps range; a sourced duty history would resolve it.</a:t>
+              <a:t>SILVER / SILVERM / SILVERMIC / SILVER100 have the same contract structure. The maturity-matched method ports directly.</a:t>
             </a:r>
           </a:p>
         </p:txBody>
@@ -14348,8 +14348,8 @@
         </p:nvSpPr>
         <p:spPr>
           <a:xfrm>
-            <a:off x="1005840" y="6309360"/>
-            <a:ext cx="7863840" cy="411480"/>
+            <a:off x="9509760" y="1645920"/>
+            <a:ext cx="7863840" cy="457200"/>
           </a:xfrm>
           <a:prstGeom prst="rect">
             <a:avLst/>
@@ -14371,13 +14371,13 @@
               </a:spcAft>
             </a:pPr>
             <a:r>
-              <a:rPr sz="1600" b="1">
-                <a:solidFill>
-                  <a:srgbClr val="1A1917"/>
+              <a:rPr sz="1500" b="1">
+                <a:solidFill>
+                  <a:srgbClr val="A67C00"/>
                 </a:solidFill>
                 <a:latin typeface="Inter"/>
               </a:rPr>
-              <a:t>Silver</a:t>
+              <a:t>BEYOND</a:t>
             </a:r>
           </a:p>
         </p:txBody>
@@ -14390,7 +14390,49 @@
         </p:nvSpPr>
         <p:spPr>
           <a:xfrm>
-            <a:off x="1005840" y="6766560"/>
+            <a:off x="9509760" y="2194560"/>
+            <a:ext cx="7863840" cy="411480"/>
+          </a:xfrm>
+          <a:prstGeom prst="rect">
+            <a:avLst/>
+          </a:prstGeom>
+          <a:noFill/>
+        </p:spPr>
+        <p:txBody>
+          <a:bodyPr wrap="square">
+            <a:spAutoFit/>
+          </a:bodyPr>
+          <a:lstStyle/>
+          <a:p>
+            <a:pPr>
+              <a:lnSpc>
+                <a:spcPct val="125000"/>
+              </a:lnSpc>
+              <a:spcAft>
+                <a:spcPts val="600"/>
+              </a:spcAft>
+            </a:pPr>
+            <a:r>
+              <a:rPr sz="1600" b="1">
+                <a:solidFill>
+                  <a:srgbClr val="1A1917"/>
+                </a:solidFill>
+                <a:latin typeface="Inter"/>
+              </a:rPr>
+              <a:t>Beyond MCX gold</a:t>
+            </a:r>
+          </a:p>
+        </p:txBody>
+      </p:sp>
+      <p:sp>
+        <p:nvSpPr>
+          <p:cNvPr id="10" name="TextBox 9"/>
+          <p:cNvSpPr txBox="1"/>
+          <p:nvPr/>
+        </p:nvSpPr>
+        <p:spPr>
+          <a:xfrm>
+            <a:off x="9509760" y="2651760"/>
             <a:ext cx="7863840" cy="1371600"/>
           </a:xfrm>
           <a:prstGeom prst="rect">
@@ -14419,21 +14461,21 @@
                 </a:solidFill>
                 <a:latin typeface="Inter"/>
               </a:rPr>
-              <a:t>SILVER / SILVERM / SILVERMIC / SILVER100 have the same contract structure. The maturity-matched method ports directly.</a:t>
+              <a:t>The general primitive: any futures series is invalid across its own specification discontinuities. Applies to NCDEX, then NSE/BSE F&amp;O.</a:t>
             </a:r>
           </a:p>
         </p:txBody>
       </p:sp>
       <p:sp>
         <p:nvSpPr>
-          <p:cNvPr id="10" name="TextBox 9"/>
+          <p:cNvPr id="11" name="TextBox 10"/>
           <p:cNvSpPr txBox="1"/>
           <p:nvPr/>
         </p:nvSpPr>
         <p:spPr>
           <a:xfrm>
-            <a:off x="9509760" y="1645920"/>
-            <a:ext cx="7863840" cy="457200"/>
+            <a:off x="9509760" y="4251960"/>
+            <a:ext cx="7863840" cy="411480"/>
           </a:xfrm>
           <a:prstGeom prst="rect">
             <a:avLst/>
@@ -14455,26 +14497,68 @@
               </a:spcAft>
             </a:pPr>
             <a:r>
-              <a:rPr sz="1500" b="1">
-                <a:solidFill>
-                  <a:srgbClr val="A67C00"/>
+              <a:rPr sz="1600" b="1">
+                <a:solidFill>
+                  <a:srgbClr val="1A1917"/>
                 </a:solidFill>
                 <a:latin typeface="Inter"/>
               </a:rPr>
-              <a:t>BEYOND</a:t>
+              <a:t>Executable prices</a:t>
             </a:r>
           </a:p>
         </p:txBody>
       </p:sp>
       <p:sp>
         <p:nvSpPr>
-          <p:cNvPr id="11" name="TextBox 10"/>
+          <p:cNvPr id="12" name="TextBox 11"/>
           <p:cNvSpPr txBox="1"/>
           <p:nvPr/>
         </p:nvSpPr>
         <p:spPr>
           <a:xfrm>
-            <a:off x="9509760" y="2194560"/>
+            <a:off x="9509760" y="4709160"/>
+            <a:ext cx="7863840" cy="1371600"/>
+          </a:xfrm>
+          <a:prstGeom prst="rect">
+            <a:avLst/>
+          </a:prstGeom>
+          <a:noFill/>
+        </p:spPr>
+        <p:txBody>
+          <a:bodyPr wrap="square">
+            <a:spAutoFit/>
+          </a:bodyPr>
+          <a:lstStyle/>
+          <a:p>
+            <a:pPr>
+              <a:lnSpc>
+                <a:spcPct val="132000"/>
+              </a:lnSpc>
+              <a:spcAft>
+                <a:spcPts val="600"/>
+              </a:spcAft>
+            </a:pPr>
+            <a:r>
+              <a:rPr sz="1350" b="0">
+                <a:solidFill>
+                  <a:srgbClr val="6B6862"/>
+                </a:solidFill>
+                <a:latin typeface="Inter"/>
+              </a:rPr>
+              <a:t>This is settlement data. An order-book feed would turn the executability audit from an upper bound into a real fill estimate.</a:t>
+            </a:r>
+          </a:p>
+        </p:txBody>
+      </p:sp>
+      <p:sp>
+        <p:nvSpPr>
+          <p:cNvPr id="13" name="TextBox 12"/>
+          <p:cNvSpPr txBox="1"/>
+          <p:nvPr/>
+        </p:nvSpPr>
+        <p:spPr>
+          <a:xfrm>
+            <a:off x="9509760" y="6309360"/>
             <a:ext cx="7863840" cy="411480"/>
           </a:xfrm>
           <a:prstGeom prst="rect">
@@ -14503,174 +14587,6 @@
                 </a:solidFill>
                 <a:latin typeface="Inter"/>
               </a:rPr>
-              <a:t>Beyond MCX gold</a:t>
-            </a:r>
-          </a:p>
-        </p:txBody>
-      </p:sp>
-      <p:sp>
-        <p:nvSpPr>
-          <p:cNvPr id="12" name="TextBox 11"/>
-          <p:cNvSpPr txBox="1"/>
-          <p:nvPr/>
-        </p:nvSpPr>
-        <p:spPr>
-          <a:xfrm>
-            <a:off x="9509760" y="2651760"/>
-            <a:ext cx="7863840" cy="1371600"/>
-          </a:xfrm>
-          <a:prstGeom prst="rect">
-            <a:avLst/>
-          </a:prstGeom>
-          <a:noFill/>
-        </p:spPr>
-        <p:txBody>
-          <a:bodyPr wrap="square">
-            <a:spAutoFit/>
-          </a:bodyPr>
-          <a:lstStyle/>
-          <a:p>
-            <a:pPr>
-              <a:lnSpc>
-                <a:spcPct val="132000"/>
-              </a:lnSpc>
-              <a:spcAft>
-                <a:spcPts val="600"/>
-              </a:spcAft>
-            </a:pPr>
-            <a:r>
-              <a:rPr sz="1350" b="0">
-                <a:solidFill>
-                  <a:srgbClr val="6B6862"/>
-                </a:solidFill>
-                <a:latin typeface="Inter"/>
-              </a:rPr>
-              <a:t>The general primitive: any futures series is invalid across its own specification discontinuities. Applies to NCDEX, then NSE/BSE F&amp;O.</a:t>
-            </a:r>
-          </a:p>
-        </p:txBody>
-      </p:sp>
-      <p:sp>
-        <p:nvSpPr>
-          <p:cNvPr id="13" name="TextBox 12"/>
-          <p:cNvSpPr txBox="1"/>
-          <p:nvPr/>
-        </p:nvSpPr>
-        <p:spPr>
-          <a:xfrm>
-            <a:off x="9509760" y="4251960"/>
-            <a:ext cx="7863840" cy="411480"/>
-          </a:xfrm>
-          <a:prstGeom prst="rect">
-            <a:avLst/>
-          </a:prstGeom>
-          <a:noFill/>
-        </p:spPr>
-        <p:txBody>
-          <a:bodyPr wrap="square">
-            <a:spAutoFit/>
-          </a:bodyPr>
-          <a:lstStyle/>
-          <a:p>
-            <a:pPr>
-              <a:lnSpc>
-                <a:spcPct val="125000"/>
-              </a:lnSpc>
-              <a:spcAft>
-                <a:spcPts val="600"/>
-              </a:spcAft>
-            </a:pPr>
-            <a:r>
-              <a:rPr sz="1600" b="1">
-                <a:solidFill>
-                  <a:srgbClr val="1A1917"/>
-                </a:solidFill>
-                <a:latin typeface="Inter"/>
-              </a:rPr>
-              <a:t>Executable prices</a:t>
-            </a:r>
-          </a:p>
-        </p:txBody>
-      </p:sp>
-      <p:sp>
-        <p:nvSpPr>
-          <p:cNvPr id="14" name="TextBox 13"/>
-          <p:cNvSpPr txBox="1"/>
-          <p:nvPr/>
-        </p:nvSpPr>
-        <p:spPr>
-          <a:xfrm>
-            <a:off x="9509760" y="4709160"/>
-            <a:ext cx="7863840" cy="1371600"/>
-          </a:xfrm>
-          <a:prstGeom prst="rect">
-            <a:avLst/>
-          </a:prstGeom>
-          <a:noFill/>
-        </p:spPr>
-        <p:txBody>
-          <a:bodyPr wrap="square">
-            <a:spAutoFit/>
-          </a:bodyPr>
-          <a:lstStyle/>
-          <a:p>
-            <a:pPr>
-              <a:lnSpc>
-                <a:spcPct val="132000"/>
-              </a:lnSpc>
-              <a:spcAft>
-                <a:spcPts val="600"/>
-              </a:spcAft>
-            </a:pPr>
-            <a:r>
-              <a:rPr sz="1350" b="0">
-                <a:solidFill>
-                  <a:srgbClr val="6B6862"/>
-                </a:solidFill>
-                <a:latin typeface="Inter"/>
-              </a:rPr>
-              <a:t>This is settlement data. An order-book feed would turn the executability audit from an upper bound into a real fill estimate.</a:t>
-            </a:r>
-          </a:p>
-        </p:txBody>
-      </p:sp>
-      <p:sp>
-        <p:nvSpPr>
-          <p:cNvPr id="15" name="TextBox 14"/>
-          <p:cNvSpPr txBox="1"/>
-          <p:nvPr/>
-        </p:nvSpPr>
-        <p:spPr>
-          <a:xfrm>
-            <a:off x="9509760" y="6309360"/>
-            <a:ext cx="7863840" cy="411480"/>
-          </a:xfrm>
-          <a:prstGeom prst="rect">
-            <a:avLst/>
-          </a:prstGeom>
-          <a:noFill/>
-        </p:spPr>
-        <p:txBody>
-          <a:bodyPr wrap="square">
-            <a:spAutoFit/>
-          </a:bodyPr>
-          <a:lstStyle/>
-          <a:p>
-            <a:pPr>
-              <a:lnSpc>
-                <a:spcPct val="125000"/>
-              </a:lnSpc>
-              <a:spcAft>
-                <a:spcPts val="600"/>
-              </a:spcAft>
-            </a:pPr>
-            <a:r>
-              <a:rPr sz="1600" b="1">
-                <a:solidFill>
-                  <a:srgbClr val="1A1917"/>
-                </a:solidFill>
-                <a:latin typeface="Inter"/>
-              </a:rPr>
               <a:t>Public corpus</a:t>
             </a:r>
           </a:p>
@@ -14678,7 +14594,7 @@
       </p:sp>
       <p:sp>
         <p:nvSpPr>
-          <p:cNvPr id="16" name="TextBox 15"/>
+          <p:cNvPr id="14" name="TextBox 13"/>
           <p:cNvSpPr txBox="1"/>
           <p:nvPr/>
         </p:nvSpPr>
@@ -15151,7 +15067,7 @@
                 </a:solidFill>
                 <a:latin typeface="Inter"/>
               </a:rPr>
-              <a:t>The November 2024 break is dated, not explained.</a:t>
+              <a:t>The November 2024 break is dated and decomposed, not guessed.</a:t>
             </a:r>
           </a:p>
         </p:txBody>
@@ -15193,7 +15109,7 @@
                 </a:solidFill>
                 <a:latin typeface="Inter"/>
               </a:rPr>
-              <a:t>We tested the obvious hypothesis — the May 2026 duty hike — and it failed the timing test: the spike peaks Feb 2026, the duty move is May 2026.</a:t>
+              <a:t>The rule-change channel is closed: MCX's own Master Circular – Products lists no GOLDGUINEA/GOLDPETAL futures-spec change in the window. It was a market event — the liquid leg held its premium while the complex fell — not a rule event.</a:t>
             </a:r>
           </a:p>
         </p:txBody>
